--- a/deck/Wildcat-Tranching-Architecture-Deck.pptx
+++ b/deck/Wildcat-Tranching-Architecture-Deck.pptx
@@ -1544,7 +1544,7 @@
                 <a:ea typeface="Arial" pitchFamily="34" charset="-122"/>
                 <a:cs typeface="Arial" pitchFamily="34" charset="-120"/>
               </a:rPr>
-              <a:t>A senior / junior credit-tranche vault layered on the Wildcat v-wmtUSDC market wrapper: its contracts, how it attaches, the design decisions, and the properties it guarantees.</a:t>
+              <a:t>A senior / junior credit-tranche vault layered on the Wildcat v-abcUSDC market wrapper: its contracts, how it attaches, the design decisions, and the properties it guarantees.</a:t>
             </a:r>
             <a:endParaRPr lang="en-US" sz="1550" dirty="0"/>
           </a:p>
@@ -3347,7 +3347,7 @@
                           <a:ea typeface="Arial" pitchFamily="34" charset="-122"/>
                           <a:cs typeface="Arial" pitchFamily="34" charset="-120"/>
                         </a:rPr>
-                        <a:t>sr-wmtUSDC / jr-wmtUSDC: Solady ERC20 + EIP-2612 permit with an ERC-4626 value-view surface. Senior open to KYC'd lenders; junior whitelisted.</a:t>
+                        <a:t>sr-abcUSDC / jr-abcUSDC: Solady ERC20 + EIP-2612 permit with an ERC-4626 value-view surface. Senior open to KYC'd lenders; junior whitelisted.</a:t>
                       </a:r>
                       <a:endParaRPr lang="en-US" sz="1100" dirty="0">
                         <a:latin typeface="Arial" charset="0"/>
@@ -4084,7 +4084,7 @@
                 <a:ea typeface="Courier New" pitchFamily="34" charset="-122"/>
                 <a:cs typeface="Courier New" pitchFamily="34" charset="-120"/>
               </a:rPr>
-              <a:t>wmtUSDC</a:t>
+              <a:t>abcUSDC</a:t>
             </a:r>
             <a:endParaRPr lang="en-US" sz="1050" dirty="0"/>
           </a:p>
@@ -4220,7 +4220,7 @@
                 <a:ea typeface="Courier New" pitchFamily="34" charset="-122"/>
                 <a:cs typeface="Courier New" pitchFamily="34" charset="-120"/>
               </a:rPr>
-              <a:t>v-wmtUSDC</a:t>
+              <a:t>v-abcUSDC</a:t>
             </a:r>
             <a:endParaRPr lang="en-US" sz="1050" dirty="0"/>
           </a:p>
@@ -4441,7 +4441,7 @@
                 <a:ea typeface="Arial" pitchFamily="34" charset="-122"/>
                 <a:cs typeface="Arial" pitchFamily="34" charset="-120"/>
               </a:rPr>
-              <a:t>sr-wmtUSDC</a:t>
+              <a:t>sr-abcUSDC</a:t>
             </a:r>
             <a:endParaRPr lang="en-US" sz="1000" dirty="0"/>
           </a:p>
@@ -4507,7 +4507,7 @@
                 <a:ea typeface="Arial" pitchFamily="34" charset="-122"/>
                 <a:cs typeface="Arial" pitchFamily="34" charset="-120"/>
               </a:rPr>
-              <a:t>jr-wmtUSDC</a:t>
+              <a:t>jr-abcUSDC</a:t>
             </a:r>
             <a:endParaRPr lang="en-US" sz="1000" dirty="0"/>
           </a:p>
@@ -6503,7 +6503,7 @@
                 <a:ea typeface="Arial" pitchFamily="34" charset="-122"/>
                 <a:cs typeface="Arial" pitchFamily="34" charset="-120"/>
               </a:rPr>
-              <a:t>Mainnet-fork tests exercise deposit, valuation and a full redemption round-trip against the live v-wmtUSDC facility and its withdrawal queue.</a:t>
+              <a:t>Mainnet-fork tests exercise deposit, valuation and a full redemption round-trip against a live production facility and its withdrawal queue.</a:t>
             </a:r>
             <a:endParaRPr lang="en-US" sz="1250" dirty="0"/>
           </a:p>
@@ -6834,7 +6834,7 @@
                 <a:ea typeface="Arial" pitchFamily="34" charset="-122"/>
                 <a:cs typeface="Arial" pitchFamily="34" charset="-120"/>
               </a:rPr>
-              <a:t>A conservative, oracle-free, first-loss credit-tranche vault over the Wildcat v-wmtUSDC facility: senior priority with a 20% junior cushion, realised-only valuation, async senior-first redemption, and an on-chain mirror of the facility's own default terms.</a:t>
+              <a:t>A conservative, oracle-free, first-loss credit-tranche vault over the Wildcat v-abcUSDC facility: senior priority with a 20% junior cushion, realised-only valuation, async senior-first redemption, and an on-chain mirror of the facility's own default terms.</a:t>
             </a:r>
             <a:endParaRPr lang="en-US" sz="1700" dirty="0"/>
           </a:p>
